--- a/decks/geog-climate-change/geog-climate-change_ch1_evidence.pptx
+++ b/decks/geog-climate-change/geog-climate-change_ch1_evidence.pptx
@@ -126,30 +126,30 @@
   <p:extLst>
     <p:ext uri="{521415D9-36F7-43E2-AB2F-B90AF26B5E84}">
       <p14:sectionLst xmlns:p14="http://schemas.microsoft.com/office/powerpoint/2010/main">
-        <p14:section name="Opening" id="{3c8599af-7cc1-a381-1b81-ba1c0d0fcb9b}">
+        <p14:section name="Opening" id="{ed9ac111-7102-7707-c877-31f789ce4903}">
           <p14:sldIdLst>
             <p14:sldId id="256"/>
           </p14:sldIdLst>
         </p14:section>
-        <p14:section name="Gate" id="{38f6dffc-597e-b7d3-7a59-7f3873337c55}">
+        <p14:section name="Gate" id="{59f3929f-4128-50bf-ecb5-9a1123dc9ee8}">
           <p14:sldIdLst>
             <p14:sldId id="257"/>
             <p14:sldId id="258"/>
           </p14:sldIdLst>
         </p14:section>
-        <p14:section name="Pre-teach" id="{8903a978-8575-00e8-43c7-a3ce3af6dbdc}">
+        <p14:section name="Pre-teach" id="{7252c3d5-f796-583f-5b32-eb085fb5633f}">
           <p14:sldIdLst>
             <p14:sldId id="259"/>
             <p14:sldId id="260"/>
           </p14:sldIdLst>
         </p14:section>
-        <p14:section name="Read-along" id="{0df21161-a368-58c0-df9a-2c0390ba58a9}">
+        <p14:section name="Read-along" id="{9c5d88e8-12e8-0ed4-e0a2-58f269e5711a}">
           <p14:sldIdLst>
             <p14:sldId id="261"/>
             <p14:sldId id="262"/>
           </p14:sldIdLst>
         </p14:section>
-        <p14:section name="Teach" id="{560f9917-142b-3b67-4785-5f8696427b18}">
+        <p14:section name="Teach" id="{3cffd2a0-18be-ad6b-2e19-ad3131c7bc30}">
           <p14:sldIdLst>
             <p14:sldId id="263"/>
             <p14:sldId id="264"/>
@@ -158,7 +158,7 @@
             <p14:sldId id="267"/>
           </p14:sldIdLst>
         </p14:section>
-        <p14:section name="Routes" id="{f66eea23-4040-16db-cd58-2f29e7bebcba}">
+        <p14:section name="Routes" id="{1b186e3d-e194-bc12-34b8-cc200cbdf0a8}">
           <p14:sldIdLst>
             <p14:sldId id="268"/>
             <p14:sldId id="269"/>
@@ -166,12 +166,12 @@
             <p14:sldId id="271"/>
           </p14:sldIdLst>
         </p14:section>
-        <p14:section name="Close" id="{c1ecc6b7-dc7b-f3ea-aa71-c1f0f0eca679}">
+        <p14:section name="Close" id="{8bc338bb-226e-ee1c-9bf8-7b19e967d9b4}">
           <p14:sldIdLst>
             <p14:sldId id="272"/>
           </p14:sldIdLst>
         </p14:section>
-        <p14:section name="Answers" id="{a0ffcb20-b6dd-1613-42d9-dae574e8871c}">
+        <p14:section name="Answers" id="{d5c8cee8-4e3b-54b9-21c5-9e9f8d7c28cd}">
           <p14:sldIdLst>
             <p14:sldId id="273"/>
             <p14:sldId id="274"/>
